--- a/ppt/chemprop_workshop.pptx
+++ b/ppt/chemprop_workshop.pptx
@@ -4806,7 +4806,7 @@
         <p:spPr>
           <a:xfrm>
             <a:off x="548640" y="1828800"/>
-            <a:ext cx="5303520" cy="4456079"/>
+            <a:ext cx="5303520" cy="4611259"/>
           </a:xfrm>
           <a:prstGeom prst="rect">
             <a:avLst/>
